--- a/submission/NEE/figures_polished/Fig2.pptx
+++ b/submission/NEE/figures_polished/Fig2.pptx
@@ -12540,33 +12540,33 @@
         </p:nvSpPr>
         <p:spPr>
           <a:xfrm>
-            <a:off x="729720" y="2937960"/>
-            <a:ext cx="4465440" cy="108360"/>
-          </a:xfrm>
-          <a:custGeom>
-            <a:avLst/>
-            <a:gdLst/>
-            <a:ahLst/>
-            <a:rect l="0" t="0" r="r" b="b"/>
-            <a:pathLst>
-              <a:path fill="none" w="12404" h="301">
-                <a:moveTo>
-                  <a:pt x="0" y="172"/>
+            <a:off x="729720" y="2934000"/>
+            <a:ext cx="4465440" cy="107640"/>
+          </a:xfrm>
+          <a:custGeom>
+            <a:avLst/>
+            <a:gdLst/>
+            <a:ahLst/>
+            <a:rect l="0" t="0" r="r" b="b"/>
+            <a:pathLst>
+              <a:path fill="none" w="12404" h="299">
+                <a:moveTo>
+                  <a:pt x="0" y="183"/>
                 </a:moveTo>
                 <a:lnTo>
                   <a:pt x="2481" y="0"/>
                 </a:lnTo>
                 <a:lnTo>
-                  <a:pt x="4962" y="18"/>
+                  <a:pt x="4962" y="19"/>
                 </a:lnTo>
                 <a:lnTo>
-                  <a:pt x="7443" y="20"/>
+                  <a:pt x="7443" y="22"/>
                 </a:lnTo>
                 <a:lnTo>
-                  <a:pt x="9924" y="35"/>
+                  <a:pt x="9924" y="36"/>
                 </a:lnTo>
                 <a:lnTo>
-                  <a:pt x="12404" y="301"/>
+                  <a:pt x="12404" y="299"/>
                 </a:lnTo>
               </a:path>
             </a:pathLst>
@@ -12602,24 +12602,24 @@
         </p:nvSpPr>
         <p:spPr>
           <a:xfrm>
-            <a:off x="729720" y="3571920"/>
-            <a:ext cx="4465440" cy="208440"/>
-          </a:xfrm>
-          <a:custGeom>
-            <a:avLst/>
-            <a:gdLst/>
-            <a:ahLst/>
-            <a:rect l="0" t="0" r="r" b="b"/>
-            <a:pathLst>
-              <a:path fill="none" w="12404" h="579">
-                <a:moveTo>
-                  <a:pt x="0" y="579"/>
+            <a:off x="729720" y="3573000"/>
+            <a:ext cx="4465440" cy="207360"/>
+          </a:xfrm>
+          <a:custGeom>
+            <a:avLst/>
+            <a:gdLst/>
+            <a:ahLst/>
+            <a:rect l="0" t="0" r="r" b="b"/>
+            <a:pathLst>
+              <a:path fill="none" w="12404" h="576">
+                <a:moveTo>
+                  <a:pt x="0" y="576"/>
                 </a:moveTo>
                 <a:lnTo>
-                  <a:pt x="2481" y="96"/>
+                  <a:pt x="2481" y="94"/>
                 </a:lnTo>
                 <a:lnTo>
-                  <a:pt x="4962" y="147"/>
+                  <a:pt x="4962" y="146"/>
                 </a:lnTo>
                 <a:lnTo>
                   <a:pt x="7443" y="147"/>
@@ -12665,32 +12665,32 @@
         <p:spPr>
           <a:xfrm>
             <a:off x="729720" y="2434320"/>
-            <a:ext cx="4465440" cy="748440"/>
-          </a:xfrm>
-          <a:custGeom>
-            <a:avLst/>
-            <a:gdLst/>
-            <a:ahLst/>
-            <a:rect l="0" t="0" r="r" b="b"/>
-            <a:pathLst>
-              <a:path fill="none" w="12404" h="2079">
+            <a:ext cx="4465440" cy="741960"/>
+          </a:xfrm>
+          <a:custGeom>
+            <a:avLst/>
+            <a:gdLst/>
+            <a:ahLst/>
+            <a:rect l="0" t="0" r="r" b="b"/>
+            <a:pathLst>
+              <a:path fill="none" w="12404" h="2061">
                 <a:moveTo>
                   <a:pt x="0" y="0"/>
                 </a:moveTo>
                 <a:lnTo>
-                  <a:pt x="2481" y="1925"/>
+                  <a:pt x="2481" y="1909"/>
                 </a:lnTo>
                 <a:lnTo>
-                  <a:pt x="4962" y="2079"/>
+                  <a:pt x="4962" y="2061"/>
                 </a:lnTo>
                 <a:lnTo>
-                  <a:pt x="7443" y="1990"/>
+                  <a:pt x="7443" y="1945"/>
                 </a:lnTo>
                 <a:lnTo>
-                  <a:pt x="9924" y="1355"/>
+                  <a:pt x="9924" y="1278"/>
                 </a:lnTo>
                 <a:lnTo>
-                  <a:pt x="12404" y="1532"/>
+                  <a:pt x="12404" y="1430"/>
                 </a:lnTo>
               </a:path>
             </a:pathLst>
@@ -12727,32 +12727,32 @@
         <p:spPr>
           <a:xfrm>
             <a:off x="729720" y="3743280"/>
-            <a:ext cx="4465440" cy="38520"/>
-          </a:xfrm>
-          <a:custGeom>
-            <a:avLst/>
-            <a:gdLst/>
-            <a:ahLst/>
-            <a:rect l="0" t="0" r="r" b="b"/>
-            <a:pathLst>
-              <a:path fill="none" w="12404" h="107">
+            <a:ext cx="4465440" cy="53280"/>
+          </a:xfrm>
+          <a:custGeom>
+            <a:avLst/>
+            <a:gdLst/>
+            <a:ahLst/>
+            <a:rect l="0" t="0" r="r" b="b"/>
+            <a:pathLst>
+              <a:path fill="none" w="12404" h="148">
                 <a:moveTo>
                   <a:pt x="0" y="0"/>
                 </a:moveTo>
                 <a:lnTo>
-                  <a:pt x="2481" y="69"/>
+                  <a:pt x="2481" y="96"/>
                 </a:lnTo>
                 <a:lnTo>
-                  <a:pt x="4962" y="50"/>
+                  <a:pt x="4962" y="80"/>
                 </a:lnTo>
                 <a:lnTo>
-                  <a:pt x="7443" y="53"/>
+                  <a:pt x="7443" y="81"/>
                 </a:lnTo>
                 <a:lnTo>
-                  <a:pt x="9924" y="54"/>
+                  <a:pt x="9924" y="86"/>
                 </a:lnTo>
                 <a:lnTo>
-                  <a:pt x="12404" y="107"/>
+                  <a:pt x="12404" y="148"/>
                 </a:lnTo>
               </a:path>
             </a:pathLst>
@@ -12903,7 +12903,7 @@
         </p:nvSpPr>
         <p:spPr>
           <a:xfrm>
-            <a:off x="1600920" y="3105360"/>
+            <a:off x="1600920" y="3099240"/>
             <a:ext cx="44280" cy="43920"/>
           </a:xfrm>
           <a:custGeom>
@@ -12961,7 +12961,7 @@
         </p:nvSpPr>
         <p:spPr>
           <a:xfrm>
-            <a:off x="1600920" y="3105360"/>
+            <a:off x="1600920" y="3099240"/>
             <a:ext cx="44280" cy="43920"/>
           </a:xfrm>
           <a:custGeom>
@@ -13018,28 +13018,28 @@
         </p:nvSpPr>
         <p:spPr>
           <a:xfrm>
-            <a:off x="2494080" y="3160440"/>
-            <a:ext cx="43920" cy="44280"/>
-          </a:xfrm>
-          <a:custGeom>
-            <a:avLst/>
-            <a:gdLst/>
-            <a:ahLst/>
-            <a:rect l="0" t="0" r="r" b="b"/>
-            <a:pathLst>
-              <a:path w="122" h="123">
-                <a:moveTo>
-                  <a:pt x="0" y="62"/>
+            <a:off x="2494080" y="3154320"/>
+            <a:ext cx="43920" cy="43920"/>
+          </a:xfrm>
+          <a:custGeom>
+            <a:avLst/>
+            <a:gdLst/>
+            <a:ahLst/>
+            <a:rect l="0" t="0" r="r" b="b"/>
+            <a:pathLst>
+              <a:path w="122" h="122">
+                <a:moveTo>
+                  <a:pt x="0" y="61"/>
                 </a:moveTo>
                 <a:cubicBezTo>
                   <a:pt x="0" y="-20"/>
                   <a:pt x="122" y="-20"/>
-                  <a:pt x="122" y="62"/>
-                </a:cubicBezTo>
-                <a:cubicBezTo>
-                  <a:pt x="122" y="144"/>
-                  <a:pt x="0" y="144"/>
-                  <a:pt x="0" y="62"/>
+                  <a:pt x="122" y="61"/>
+                </a:cubicBezTo>
+                <a:cubicBezTo>
+                  <a:pt x="122" y="143"/>
+                  <a:pt x="0" y="143"/>
+                  <a:pt x="0" y="61"/>
                 </a:cubicBezTo>
                 <a:close/>
               </a:path>
@@ -13076,28 +13076,28 @@
         </p:nvSpPr>
         <p:spPr>
           <a:xfrm>
-            <a:off x="2494080" y="3160440"/>
-            <a:ext cx="43920" cy="44280"/>
-          </a:xfrm>
-          <a:custGeom>
-            <a:avLst/>
-            <a:gdLst/>
-            <a:ahLst/>
-            <a:rect l="0" t="0" r="r" b="b"/>
-            <a:pathLst>
-              <a:path fill="none" w="122" h="123">
-                <a:moveTo>
-                  <a:pt x="122" y="62"/>
-                </a:moveTo>
-                <a:cubicBezTo>
-                  <a:pt x="122" y="144"/>
-                  <a:pt x="0" y="144"/>
-                  <a:pt x="0" y="62"/>
+            <a:off x="2494080" y="3154320"/>
+            <a:ext cx="43920" cy="43920"/>
+          </a:xfrm>
+          <a:custGeom>
+            <a:avLst/>
+            <a:gdLst/>
+            <a:ahLst/>
+            <a:rect l="0" t="0" r="r" b="b"/>
+            <a:pathLst>
+              <a:path fill="none" w="122" h="122">
+                <a:moveTo>
+                  <a:pt x="122" y="61"/>
+                </a:moveTo>
+                <a:cubicBezTo>
+                  <a:pt x="122" y="143"/>
+                  <a:pt x="0" y="143"/>
+                  <a:pt x="0" y="61"/>
                 </a:cubicBezTo>
                 <a:cubicBezTo>
                   <a:pt x="0" y="-20"/>
                   <a:pt x="122" y="-20"/>
-                  <a:pt x="122" y="62"/>
+                  <a:pt x="122" y="61"/>
                 </a:cubicBezTo>
               </a:path>
             </a:pathLst>
@@ -13133,28 +13133,28 @@
         </p:nvSpPr>
         <p:spPr>
           <a:xfrm>
-            <a:off x="3386880" y="3128400"/>
-            <a:ext cx="44280" cy="43920"/>
-          </a:xfrm>
-          <a:custGeom>
-            <a:avLst/>
-            <a:gdLst/>
-            <a:ahLst/>
-            <a:rect l="0" t="0" r="r" b="b"/>
-            <a:pathLst>
-              <a:path w="123" h="122">
-                <a:moveTo>
-                  <a:pt x="0" y="61"/>
+            <a:off x="3386880" y="3112560"/>
+            <a:ext cx="44280" cy="44280"/>
+          </a:xfrm>
+          <a:custGeom>
+            <a:avLst/>
+            <a:gdLst/>
+            <a:ahLst/>
+            <a:rect l="0" t="0" r="r" b="b"/>
+            <a:pathLst>
+              <a:path w="123" h="123">
+                <a:moveTo>
+                  <a:pt x="0" y="62"/>
                 </a:moveTo>
                 <a:cubicBezTo>
                   <a:pt x="0" y="-20"/>
                   <a:pt x="123" y="-20"/>
-                  <a:pt x="123" y="61"/>
-                </a:cubicBezTo>
-                <a:cubicBezTo>
-                  <a:pt x="123" y="142"/>
-                  <a:pt x="0" y="142"/>
-                  <a:pt x="0" y="61"/>
+                  <a:pt x="123" y="62"/>
+                </a:cubicBezTo>
+                <a:cubicBezTo>
+                  <a:pt x="123" y="144"/>
+                  <a:pt x="0" y="144"/>
+                  <a:pt x="0" y="62"/>
                 </a:cubicBezTo>
                 <a:close/>
               </a:path>
@@ -13191,28 +13191,28 @@
         </p:nvSpPr>
         <p:spPr>
           <a:xfrm>
-            <a:off x="3386880" y="3128400"/>
-            <a:ext cx="44280" cy="43920"/>
-          </a:xfrm>
-          <a:custGeom>
-            <a:avLst/>
-            <a:gdLst/>
-            <a:ahLst/>
-            <a:rect l="0" t="0" r="r" b="b"/>
-            <a:pathLst>
-              <a:path fill="none" w="123" h="122">
-                <a:moveTo>
-                  <a:pt x="123" y="61"/>
-                </a:moveTo>
-                <a:cubicBezTo>
-                  <a:pt x="123" y="142"/>
-                  <a:pt x="0" y="142"/>
-                  <a:pt x="0" y="61"/>
+            <a:off x="3386880" y="3112560"/>
+            <a:ext cx="44280" cy="44280"/>
+          </a:xfrm>
+          <a:custGeom>
+            <a:avLst/>
+            <a:gdLst/>
+            <a:ahLst/>
+            <a:rect l="0" t="0" r="r" b="b"/>
+            <a:pathLst>
+              <a:path fill="none" w="123" h="123">
+                <a:moveTo>
+                  <a:pt x="123" y="62"/>
+                </a:moveTo>
+                <a:cubicBezTo>
+                  <a:pt x="123" y="144"/>
+                  <a:pt x="0" y="144"/>
+                  <a:pt x="0" y="62"/>
                 </a:cubicBezTo>
                 <a:cubicBezTo>
                   <a:pt x="0" y="-20"/>
                   <a:pt x="123" y="-20"/>
-                  <a:pt x="123" y="61"/>
+                  <a:pt x="123" y="62"/>
                 </a:cubicBezTo>
               </a:path>
             </a:pathLst>
@@ -13248,7 +13248,7 @@
         </p:nvSpPr>
         <p:spPr>
           <a:xfrm>
-            <a:off x="4280040" y="2900160"/>
+            <a:off x="4280040" y="2872080"/>
             <a:ext cx="43920" cy="43920"/>
           </a:xfrm>
           <a:custGeom>
@@ -13306,7 +13306,7 @@
         </p:nvSpPr>
         <p:spPr>
           <a:xfrm>
-            <a:off x="4280040" y="2900160"/>
+            <a:off x="4280040" y="2872080"/>
             <a:ext cx="43920" cy="43920"/>
           </a:xfrm>
           <a:custGeom>
@@ -13363,7 +13363,7 @@
         </p:nvSpPr>
         <p:spPr>
           <a:xfrm>
-            <a:off x="5173200" y="2963520"/>
+            <a:off x="5173200" y="2926800"/>
             <a:ext cx="43920" cy="43920"/>
           </a:xfrm>
           <a:custGeom>
@@ -13382,8 +13382,8 @@
                   <a:pt x="122" y="62"/>
                 </a:cubicBezTo>
                 <a:cubicBezTo>
-                  <a:pt x="122" y="142"/>
-                  <a:pt x="0" y="142"/>
+                  <a:pt x="122" y="143"/>
+                  <a:pt x="0" y="143"/>
                   <a:pt x="0" y="62"/>
                 </a:cubicBezTo>
                 <a:close/>
@@ -13421,7 +13421,7 @@
         </p:nvSpPr>
         <p:spPr>
           <a:xfrm>
-            <a:off x="5173200" y="2963520"/>
+            <a:off x="5173200" y="2926800"/>
             <a:ext cx="43920" cy="43920"/>
           </a:xfrm>
           <a:custGeom>
@@ -13435,8 +13435,8 @@
                   <a:pt x="122" y="62"/>
                 </a:moveTo>
                 <a:cubicBezTo>
-                  <a:pt x="122" y="142"/>
-                  <a:pt x="0" y="142"/>
+                  <a:pt x="122" y="143"/>
+                  <a:pt x="0" y="143"/>
                   <a:pt x="0" y="62"/>
                 </a:cubicBezTo>
                 <a:cubicBezTo>
@@ -13593,7 +13593,7 @@
         </p:nvSpPr>
         <p:spPr>
           <a:xfrm>
-            <a:off x="1600920" y="2916000"/>
+            <a:off x="1600920" y="2912040"/>
             <a:ext cx="44280" cy="43920"/>
           </a:xfrm>
           <a:custGeom>
@@ -13651,7 +13651,7 @@
         </p:nvSpPr>
         <p:spPr>
           <a:xfrm>
-            <a:off x="1600920" y="2916000"/>
+            <a:off x="1600920" y="2912040"/>
             <a:ext cx="44280" cy="43920"/>
           </a:xfrm>
           <a:custGeom>
@@ -13708,7 +13708,7 @@
         </p:nvSpPr>
         <p:spPr>
           <a:xfrm>
-            <a:off x="2494080" y="2922480"/>
+            <a:off x="2494080" y="2919240"/>
             <a:ext cx="43920" cy="43920"/>
           </a:xfrm>
           <a:custGeom>
@@ -13727,8 +13727,8 @@
                   <a:pt x="122" y="62"/>
                 </a:cubicBezTo>
                 <a:cubicBezTo>
-                  <a:pt x="122" y="142"/>
-                  <a:pt x="0" y="142"/>
+                  <a:pt x="122" y="143"/>
+                  <a:pt x="0" y="143"/>
                   <a:pt x="0" y="62"/>
                 </a:cubicBezTo>
                 <a:close/>
@@ -13766,7 +13766,7 @@
         </p:nvSpPr>
         <p:spPr>
           <a:xfrm>
-            <a:off x="2494080" y="2922480"/>
+            <a:off x="2494080" y="2919240"/>
             <a:ext cx="43920" cy="43920"/>
           </a:xfrm>
           <a:custGeom>
@@ -13780,8 +13780,8 @@
                   <a:pt x="122" y="62"/>
                 </a:moveTo>
                 <a:cubicBezTo>
-                  <a:pt x="122" y="142"/>
-                  <a:pt x="0" y="142"/>
+                  <a:pt x="122" y="143"/>
+                  <a:pt x="0" y="143"/>
                   <a:pt x="0" y="62"/>
                 </a:cubicBezTo>
                 <a:cubicBezTo>
@@ -13823,7 +13823,7 @@
         </p:nvSpPr>
         <p:spPr>
           <a:xfrm>
-            <a:off x="3386880" y="2923560"/>
+            <a:off x="3386880" y="2919960"/>
             <a:ext cx="44280" cy="43920"/>
           </a:xfrm>
           <a:custGeom>
@@ -13881,7 +13881,7 @@
         </p:nvSpPr>
         <p:spPr>
           <a:xfrm>
-            <a:off x="3386880" y="2923560"/>
+            <a:off x="3386880" y="2919960"/>
             <a:ext cx="44280" cy="43920"/>
           </a:xfrm>
           <a:custGeom>
@@ -13938,7 +13938,7 @@
         </p:nvSpPr>
         <p:spPr>
           <a:xfrm>
-            <a:off x="4280040" y="2928600"/>
+            <a:off x="4280040" y="2925360"/>
             <a:ext cx="43920" cy="43920"/>
           </a:xfrm>
           <a:custGeom>
@@ -13996,7 +13996,7 @@
         </p:nvSpPr>
         <p:spPr>
           <a:xfrm>
-            <a:off x="4280040" y="2928600"/>
+            <a:off x="4280040" y="2925360"/>
             <a:ext cx="43920" cy="43920"/>
           </a:xfrm>
           <a:custGeom>
@@ -14053,16 +14053,16 @@
         </p:nvSpPr>
         <p:spPr>
           <a:xfrm>
-            <a:off x="5173200" y="3024000"/>
-            <a:ext cx="43920" cy="44280"/>
-          </a:xfrm>
-          <a:custGeom>
-            <a:avLst/>
-            <a:gdLst/>
-            <a:ahLst/>
-            <a:rect l="0" t="0" r="r" b="b"/>
-            <a:pathLst>
-              <a:path w="122" h="123">
+            <a:off x="5173200" y="3019680"/>
+            <a:ext cx="43920" cy="43920"/>
+          </a:xfrm>
+          <a:custGeom>
+            <a:avLst/>
+            <a:gdLst/>
+            <a:ahLst/>
+            <a:rect l="0" t="0" r="r" b="b"/>
+            <a:pathLst>
+              <a:path w="122" h="122">
                 <a:moveTo>
                   <a:pt x="0" y="62"/>
                 </a:moveTo>
@@ -14072,8 +14072,8 @@
                   <a:pt x="122" y="62"/>
                 </a:cubicBezTo>
                 <a:cubicBezTo>
-                  <a:pt x="122" y="144"/>
-                  <a:pt x="0" y="144"/>
+                  <a:pt x="122" y="143"/>
+                  <a:pt x="0" y="143"/>
                   <a:pt x="0" y="62"/>
                 </a:cubicBezTo>
                 <a:close/>
@@ -14111,22 +14111,22 @@
         </p:nvSpPr>
         <p:spPr>
           <a:xfrm>
-            <a:off x="5173200" y="3024000"/>
-            <a:ext cx="43920" cy="44280"/>
-          </a:xfrm>
-          <a:custGeom>
-            <a:avLst/>
-            <a:gdLst/>
-            <a:ahLst/>
-            <a:rect l="0" t="0" r="r" b="b"/>
-            <a:pathLst>
-              <a:path fill="none" w="122" h="123">
+            <a:off x="5173200" y="3019680"/>
+            <a:ext cx="43920" cy="43920"/>
+          </a:xfrm>
+          <a:custGeom>
+            <a:avLst/>
+            <a:gdLst/>
+            <a:ahLst/>
+            <a:rect l="0" t="0" r="r" b="b"/>
+            <a:pathLst>
+              <a:path fill="none" w="122" h="122">
                 <a:moveTo>
                   <a:pt x="122" y="62"/>
                 </a:moveTo>
                 <a:cubicBezTo>
-                  <a:pt x="122" y="144"/>
-                  <a:pt x="0" y="144"/>
+                  <a:pt x="122" y="143"/>
+                  <a:pt x="0" y="143"/>
                   <a:pt x="0" y="62"/>
                 </a:cubicBezTo>
                 <a:cubicBezTo>
@@ -14283,7 +14283,7 @@
         </p:nvSpPr>
         <p:spPr>
           <a:xfrm>
-            <a:off x="1600920" y="3584520"/>
+            <a:off x="1600920" y="3584880"/>
             <a:ext cx="44280" cy="43920"/>
           </a:xfrm>
           <a:custGeom>
@@ -14341,7 +14341,7 @@
         </p:nvSpPr>
         <p:spPr>
           <a:xfrm>
-            <a:off x="1600920" y="3584520"/>
+            <a:off x="1600920" y="3584880"/>
             <a:ext cx="44280" cy="43920"/>
           </a:xfrm>
           <a:custGeom>
@@ -14398,7 +14398,7 @@
         </p:nvSpPr>
         <p:spPr>
           <a:xfrm>
-            <a:off x="2494080" y="3602880"/>
+            <a:off x="2494080" y="3603240"/>
             <a:ext cx="43920" cy="43920"/>
           </a:xfrm>
           <a:custGeom>
@@ -14417,8 +14417,8 @@
                   <a:pt x="122" y="61"/>
                 </a:cubicBezTo>
                 <a:cubicBezTo>
-                  <a:pt x="122" y="142"/>
-                  <a:pt x="0" y="142"/>
+                  <a:pt x="122" y="143"/>
+                  <a:pt x="0" y="143"/>
                   <a:pt x="0" y="61"/>
                 </a:cubicBezTo>
                 <a:close/>
@@ -14456,7 +14456,7 @@
         </p:nvSpPr>
         <p:spPr>
           <a:xfrm>
-            <a:off x="2494080" y="3602880"/>
+            <a:off x="2494080" y="3603240"/>
             <a:ext cx="43920" cy="43920"/>
           </a:xfrm>
           <a:custGeom>
@@ -14470,8 +14470,8 @@
                   <a:pt x="122" y="61"/>
                 </a:moveTo>
                 <a:cubicBezTo>
-                  <a:pt x="122" y="142"/>
-                  <a:pt x="0" y="142"/>
+                  <a:pt x="122" y="143"/>
+                  <a:pt x="0" y="143"/>
                   <a:pt x="0" y="61"/>
                 </a:cubicBezTo>
                 <a:cubicBezTo>
@@ -14513,7 +14513,7 @@
         </p:nvSpPr>
         <p:spPr>
           <a:xfrm>
-            <a:off x="3386880" y="3603240"/>
+            <a:off x="3386880" y="3603600"/>
             <a:ext cx="44280" cy="43920"/>
           </a:xfrm>
           <a:custGeom>
@@ -14571,7 +14571,7 @@
         </p:nvSpPr>
         <p:spPr>
           <a:xfrm>
-            <a:off x="3386880" y="3603240"/>
+            <a:off x="3386880" y="3603600"/>
             <a:ext cx="44280" cy="43920"/>
           </a:xfrm>
           <a:custGeom>
@@ -14628,7 +14628,7 @@
         </p:nvSpPr>
         <p:spPr>
           <a:xfrm>
-            <a:off x="4280040" y="3598560"/>
+            <a:off x="4280040" y="3599280"/>
             <a:ext cx="43920" cy="44280"/>
           </a:xfrm>
           <a:custGeom>
@@ -14686,7 +14686,7 @@
         </p:nvSpPr>
         <p:spPr>
           <a:xfrm>
-            <a:off x="4280040" y="3598560"/>
+            <a:off x="4280040" y="3599280"/>
             <a:ext cx="43920" cy="44280"/>
           </a:xfrm>
           <a:custGeom>
@@ -14743,28 +14743,28 @@
         </p:nvSpPr>
         <p:spPr>
           <a:xfrm>
-            <a:off x="5173200" y="3550320"/>
-            <a:ext cx="43920" cy="43920"/>
-          </a:xfrm>
-          <a:custGeom>
-            <a:avLst/>
-            <a:gdLst/>
-            <a:ahLst/>
-            <a:rect l="0" t="0" r="r" b="b"/>
-            <a:pathLst>
-              <a:path w="122" h="122">
-                <a:moveTo>
-                  <a:pt x="0" y="61"/>
+            <a:off x="5173200" y="3551040"/>
+            <a:ext cx="43920" cy="44280"/>
+          </a:xfrm>
+          <a:custGeom>
+            <a:avLst/>
+            <a:gdLst/>
+            <a:ahLst/>
+            <a:rect l="0" t="0" r="r" b="b"/>
+            <a:pathLst>
+              <a:path w="122" h="123">
+                <a:moveTo>
+                  <a:pt x="0" y="62"/>
                 </a:moveTo>
                 <a:cubicBezTo>
                   <a:pt x="0" y="-20"/>
                   <a:pt x="122" y="-20"/>
-                  <a:pt x="122" y="61"/>
-                </a:cubicBezTo>
-                <a:cubicBezTo>
-                  <a:pt x="122" y="143"/>
-                  <a:pt x="0" y="143"/>
-                  <a:pt x="0" y="61"/>
+                  <a:pt x="122" y="62"/>
+                </a:cubicBezTo>
+                <a:cubicBezTo>
+                  <a:pt x="122" y="144"/>
+                  <a:pt x="0" y="144"/>
+                  <a:pt x="0" y="62"/>
                 </a:cubicBezTo>
                 <a:close/>
               </a:path>
@@ -14801,28 +14801,28 @@
         </p:nvSpPr>
         <p:spPr>
           <a:xfrm>
-            <a:off x="5173200" y="3550320"/>
-            <a:ext cx="43920" cy="43920"/>
-          </a:xfrm>
-          <a:custGeom>
-            <a:avLst/>
-            <a:gdLst/>
-            <a:ahLst/>
-            <a:rect l="0" t="0" r="r" b="b"/>
-            <a:pathLst>
-              <a:path fill="none" w="122" h="122">
-                <a:moveTo>
-                  <a:pt x="122" y="61"/>
-                </a:moveTo>
-                <a:cubicBezTo>
-                  <a:pt x="122" y="143"/>
-                  <a:pt x="0" y="143"/>
-                  <a:pt x="0" y="61"/>
+            <a:off x="5173200" y="3551040"/>
+            <a:ext cx="43920" cy="44280"/>
+          </a:xfrm>
+          <a:custGeom>
+            <a:avLst/>
+            <a:gdLst/>
+            <a:ahLst/>
+            <a:rect l="0" t="0" r="r" b="b"/>
+            <a:pathLst>
+              <a:path fill="none" w="122" h="123">
+                <a:moveTo>
+                  <a:pt x="122" y="62"/>
+                </a:moveTo>
+                <a:cubicBezTo>
+                  <a:pt x="122" y="144"/>
+                  <a:pt x="0" y="144"/>
+                  <a:pt x="0" y="62"/>
                 </a:cubicBezTo>
                 <a:cubicBezTo>
                   <a:pt x="0" y="-20"/>
                   <a:pt x="122" y="-20"/>
-                  <a:pt x="122" y="61"/>
+                  <a:pt x="122" y="62"/>
                 </a:cubicBezTo>
               </a:path>
             </a:pathLst>
@@ -14973,7 +14973,7 @@
         </p:nvSpPr>
         <p:spPr>
           <a:xfrm>
-            <a:off x="1600920" y="3745800"/>
+            <a:off x="1600920" y="3756240"/>
             <a:ext cx="44280" cy="43920"/>
           </a:xfrm>
           <a:custGeom>
@@ -14992,8 +14992,8 @@
                   <a:pt x="123" y="61"/>
                 </a:cubicBezTo>
                 <a:cubicBezTo>
-                  <a:pt x="123" y="143"/>
-                  <a:pt x="0" y="143"/>
+                  <a:pt x="123" y="142"/>
+                  <a:pt x="0" y="142"/>
                   <a:pt x="0" y="61"/>
                 </a:cubicBezTo>
                 <a:close/>
@@ -15031,7 +15031,7 @@
         </p:nvSpPr>
         <p:spPr>
           <a:xfrm>
-            <a:off x="1600920" y="3745800"/>
+            <a:off x="1600920" y="3756240"/>
             <a:ext cx="44280" cy="43920"/>
           </a:xfrm>
           <a:custGeom>
@@ -15045,8 +15045,8 @@
                   <a:pt x="123" y="61"/>
                 </a:moveTo>
                 <a:cubicBezTo>
-                  <a:pt x="123" y="143"/>
-                  <a:pt x="0" y="143"/>
+                  <a:pt x="123" y="142"/>
+                  <a:pt x="0" y="142"/>
                   <a:pt x="0" y="61"/>
                 </a:cubicBezTo>
                 <a:cubicBezTo>
@@ -15088,7 +15088,7 @@
         </p:nvSpPr>
         <p:spPr>
           <a:xfrm>
-            <a:off x="2494080" y="3739320"/>
+            <a:off x="2494080" y="3750120"/>
             <a:ext cx="43920" cy="43920"/>
           </a:xfrm>
           <a:custGeom>
@@ -15099,17 +15099,17 @@
             <a:pathLst>
               <a:path w="122" h="122">
                 <a:moveTo>
-                  <a:pt x="0" y="60"/>
+                  <a:pt x="0" y="62"/>
                 </a:moveTo>
                 <a:cubicBezTo>
                   <a:pt x="0" y="-20"/>
                   <a:pt x="122" y="-20"/>
-                  <a:pt x="122" y="60"/>
-                </a:cubicBezTo>
-                <a:cubicBezTo>
-                  <a:pt x="122" y="142"/>
-                  <a:pt x="0" y="142"/>
-                  <a:pt x="0" y="60"/>
+                  <a:pt x="122" y="62"/>
+                </a:cubicBezTo>
+                <a:cubicBezTo>
+                  <a:pt x="122" y="143"/>
+                  <a:pt x="0" y="143"/>
+                  <a:pt x="0" y="62"/>
                 </a:cubicBezTo>
                 <a:close/>
               </a:path>
@@ -15146,7 +15146,7 @@
         </p:nvSpPr>
         <p:spPr>
           <a:xfrm>
-            <a:off x="2494080" y="3739320"/>
+            <a:off x="2494080" y="3750120"/>
             <a:ext cx="43920" cy="43920"/>
           </a:xfrm>
           <a:custGeom>
@@ -15157,17 +15157,17 @@
             <a:pathLst>
               <a:path fill="none" w="122" h="122">
                 <a:moveTo>
-                  <a:pt x="122" y="60"/>
-                </a:moveTo>
-                <a:cubicBezTo>
-                  <a:pt x="122" y="142"/>
-                  <a:pt x="0" y="142"/>
-                  <a:pt x="0" y="60"/>
+                  <a:pt x="122" y="62"/>
+                </a:moveTo>
+                <a:cubicBezTo>
+                  <a:pt x="122" y="143"/>
+                  <a:pt x="0" y="143"/>
+                  <a:pt x="0" y="62"/>
                 </a:cubicBezTo>
                 <a:cubicBezTo>
                   <a:pt x="0" y="-20"/>
                   <a:pt x="122" y="-20"/>
-                  <a:pt x="122" y="60"/>
+                  <a:pt x="122" y="62"/>
                 </a:cubicBezTo>
               </a:path>
             </a:pathLst>
@@ -15203,7 +15203,7 @@
         </p:nvSpPr>
         <p:spPr>
           <a:xfrm>
-            <a:off x="3386880" y="3740040"/>
+            <a:off x="3386880" y="3750480"/>
             <a:ext cx="44280" cy="43920"/>
           </a:xfrm>
           <a:custGeom>
@@ -15214,17 +15214,17 @@
             <a:pathLst>
               <a:path w="123" h="122">
                 <a:moveTo>
-                  <a:pt x="0" y="61"/>
+                  <a:pt x="0" y="62"/>
                 </a:moveTo>
                 <a:cubicBezTo>
                   <a:pt x="0" y="-20"/>
                   <a:pt x="123" y="-20"/>
-                  <a:pt x="123" y="61"/>
+                  <a:pt x="123" y="62"/>
                 </a:cubicBezTo>
                 <a:cubicBezTo>
                   <a:pt x="123" y="142"/>
                   <a:pt x="0" y="142"/>
-                  <a:pt x="0" y="61"/>
+                  <a:pt x="0" y="62"/>
                 </a:cubicBezTo>
                 <a:close/>
               </a:path>
@@ -15261,7 +15261,7 @@
         </p:nvSpPr>
         <p:spPr>
           <a:xfrm>
-            <a:off x="3386880" y="3740040"/>
+            <a:off x="3386880" y="3750480"/>
             <a:ext cx="44280" cy="43920"/>
           </a:xfrm>
           <a:custGeom>
@@ -15272,17 +15272,17 @@
             <a:pathLst>
               <a:path fill="none" w="123" h="122">
                 <a:moveTo>
-                  <a:pt x="123" y="61"/>
+                  <a:pt x="123" y="62"/>
                 </a:moveTo>
                 <a:cubicBezTo>
                   <a:pt x="123" y="142"/>
                   <a:pt x="0" y="142"/>
-                  <a:pt x="0" y="61"/>
+                  <a:pt x="0" y="62"/>
                 </a:cubicBezTo>
                 <a:cubicBezTo>
                   <a:pt x="0" y="-20"/>
                   <a:pt x="123" y="-20"/>
-                  <a:pt x="123" y="61"/>
+                  <a:pt x="123" y="62"/>
                 </a:cubicBezTo>
               </a:path>
             </a:pathLst>
@@ -15318,7 +15318,7 @@
         </p:nvSpPr>
         <p:spPr>
           <a:xfrm>
-            <a:off x="4280040" y="3740760"/>
+            <a:off x="4280040" y="3752280"/>
             <a:ext cx="43920" cy="43920"/>
           </a:xfrm>
           <a:custGeom>
@@ -15329,17 +15329,17 @@
             <a:pathLst>
               <a:path w="122" h="122">
                 <a:moveTo>
-                  <a:pt x="0" y="60"/>
+                  <a:pt x="0" y="62"/>
                 </a:moveTo>
                 <a:cubicBezTo>
                   <a:pt x="0" y="-20"/>
                   <a:pt x="122" y="-20"/>
-                  <a:pt x="122" y="60"/>
-                </a:cubicBezTo>
-                <a:cubicBezTo>
-                  <a:pt x="122" y="142"/>
-                  <a:pt x="0" y="142"/>
-                  <a:pt x="0" y="60"/>
+                  <a:pt x="122" y="62"/>
+                </a:cubicBezTo>
+                <a:cubicBezTo>
+                  <a:pt x="122" y="143"/>
+                  <a:pt x="0" y="143"/>
+                  <a:pt x="0" y="62"/>
                 </a:cubicBezTo>
                 <a:close/>
               </a:path>
@@ -15376,7 +15376,7 @@
         </p:nvSpPr>
         <p:spPr>
           <a:xfrm>
-            <a:off x="4280040" y="3740760"/>
+            <a:off x="4280040" y="3752280"/>
             <a:ext cx="43920" cy="43920"/>
           </a:xfrm>
           <a:custGeom>
@@ -15387,17 +15387,17 @@
             <a:pathLst>
               <a:path fill="none" w="122" h="122">
                 <a:moveTo>
-                  <a:pt x="122" y="60"/>
-                </a:moveTo>
-                <a:cubicBezTo>
-                  <a:pt x="122" y="142"/>
-                  <a:pt x="0" y="142"/>
-                  <a:pt x="0" y="60"/>
+                  <a:pt x="122" y="62"/>
+                </a:moveTo>
+                <a:cubicBezTo>
+                  <a:pt x="122" y="143"/>
+                  <a:pt x="0" y="143"/>
+                  <a:pt x="0" y="62"/>
                 </a:cubicBezTo>
                 <a:cubicBezTo>
                   <a:pt x="0" y="-20"/>
                   <a:pt x="122" y="-20"/>
-                  <a:pt x="122" y="60"/>
+                  <a:pt x="122" y="62"/>
                 </a:cubicBezTo>
               </a:path>
             </a:pathLst>
@@ -15433,16 +15433,16 @@
         </p:nvSpPr>
         <p:spPr>
           <a:xfrm>
-            <a:off x="5173200" y="3759480"/>
-            <a:ext cx="43920" cy="43920"/>
-          </a:xfrm>
-          <a:custGeom>
-            <a:avLst/>
-            <a:gdLst/>
-            <a:ahLst/>
-            <a:rect l="0" t="0" r="r" b="b"/>
-            <a:pathLst>
-              <a:path w="122" h="122">
+            <a:off x="5173200" y="3774600"/>
+            <a:ext cx="43920" cy="44280"/>
+          </a:xfrm>
+          <a:custGeom>
+            <a:avLst/>
+            <a:gdLst/>
+            <a:ahLst/>
+            <a:rect l="0" t="0" r="r" b="b"/>
+            <a:pathLst>
+              <a:path w="122" h="123">
                 <a:moveTo>
                   <a:pt x="0" y="62"/>
                 </a:moveTo>
@@ -15452,8 +15452,8 @@
                   <a:pt x="122" y="62"/>
                 </a:cubicBezTo>
                 <a:cubicBezTo>
-                  <a:pt x="122" y="143"/>
-                  <a:pt x="0" y="143"/>
+                  <a:pt x="122" y="144"/>
+                  <a:pt x="0" y="144"/>
                   <a:pt x="0" y="62"/>
                 </a:cubicBezTo>
                 <a:close/>
@@ -15491,22 +15491,22 @@
         </p:nvSpPr>
         <p:spPr>
           <a:xfrm>
-            <a:off x="5173200" y="3759480"/>
-            <a:ext cx="43920" cy="43920"/>
-          </a:xfrm>
-          <a:custGeom>
-            <a:avLst/>
-            <a:gdLst/>
-            <a:ahLst/>
-            <a:rect l="0" t="0" r="r" b="b"/>
-            <a:pathLst>
-              <a:path fill="none" w="122" h="122">
+            <a:off x="5173200" y="3774600"/>
+            <a:ext cx="43920" cy="44280"/>
+          </a:xfrm>
+          <a:custGeom>
+            <a:avLst/>
+            <a:gdLst/>
+            <a:ahLst/>
+            <a:rect l="0" t="0" r="r" b="b"/>
+            <a:pathLst>
+              <a:path fill="none" w="122" h="123">
                 <a:moveTo>
                   <a:pt x="122" y="62"/>
                 </a:moveTo>
                 <a:cubicBezTo>
-                  <a:pt x="122" y="143"/>
-                  <a:pt x="0" y="143"/>
+                  <a:pt x="122" y="144"/>
+                  <a:pt x="0" y="144"/>
                   <a:pt x="0" y="62"/>
                 </a:cubicBezTo>
                 <a:cubicBezTo>
@@ -15596,7 +15596,7 @@
         </p:nvSpPr>
         <p:spPr>
           <a:xfrm>
-            <a:off x="5338080" y="2917440"/>
+            <a:off x="5338080" y="2896920"/>
             <a:ext cx="432720" cy="86040"/>
           </a:xfrm>
           <a:prstGeom prst="rect">
@@ -15644,7 +15644,7 @@
         </p:nvSpPr>
         <p:spPr>
           <a:xfrm>
-            <a:off x="5338080" y="3025080"/>
+            <a:off x="5338080" y="3004560"/>
             <a:ext cx="750240" cy="86040"/>
           </a:xfrm>
           <a:prstGeom prst="rect">
@@ -15692,7 +15692,7 @@
         </p:nvSpPr>
         <p:spPr>
           <a:xfrm>
-            <a:off x="5338080" y="3528000"/>
+            <a:off x="5338080" y="3528720"/>
             <a:ext cx="839160" cy="86040"/>
           </a:xfrm>
           <a:prstGeom prst="rect">
@@ -15740,7 +15740,7 @@
         </p:nvSpPr>
         <p:spPr>
           <a:xfrm>
-            <a:off x="5338080" y="3737160"/>
+            <a:off x="5338080" y="3751920"/>
             <a:ext cx="565920" cy="86040"/>
           </a:xfrm>
           <a:prstGeom prst="rect">
@@ -15879,7 +15879,7 @@
         </p:nvSpPr>
         <p:spPr>
           <a:xfrm>
-            <a:off x="1393920" y="3147480"/>
+            <a:off x="1393920" y="3141720"/>
             <a:ext cx="149040" cy="86040"/>
           </a:xfrm>
           <a:prstGeom prst="rect">
